--- a/docs/Models-as-Parametric-Kernels.pptx
+++ b/docs/Models-as-Parametric-Kernels.pptx
@@ -22061,6 +22061,28 @@
               <a:t>Full treatment — including the impossibility proof, the conservative-extension and satisfaction-condition results, the semiring construction for assurance evidence, and what was deliberately not adopted — in the accompanying paper.</a:t>
             </a:r>
           </a:p>
+          <a:p>
+            <a:pPr>
+              <a:lnSpc>
+                <a:spcPct val="125000"/>
+              </a:lnSpc>
+              <a:spcBef>
+                <a:spcPts val="1000"/>
+              </a:spcBef>
+              <a:spcAft>
+                <a:spcPts val="600"/>
+              </a:spcAft>
+            </a:pPr>
+            <a:r>
+              <a:rPr sz="850" b="0" i="0">
+                <a:solidFill>
+                  <a:srgbClr val="D8A0AC"/>
+                </a:solidFill>
+                <a:latin typeface="Calibri"/>
+              </a:rPr>
+              <a:t>© 2026 Ashutosh Sinha. Licensed CC BY-NC-ND 4.0. Quoted regulation and scholarship remain their owners'. A research document — not legal, regulatory or financial advice.</a:t>
+            </a:r>
+          </a:p>
         </p:txBody>
       </p:sp>
     </p:spTree>

--- a/docs/Models-as-Parametric-Kernels.pptx
+++ b/docs/Models-as-Parametric-Kernels.pptx
@@ -12571,8 +12571,8 @@
         </p:nvSpPr>
         <p:spPr>
           <a:xfrm>
-            <a:off x="777240" y="4928870"/>
-            <a:ext cx="10637215" cy="868680"/>
+            <a:off x="777240" y="4892294"/>
+            <a:ext cx="10637215" cy="987552"/>
           </a:xfrm>
           <a:prstGeom prst="rect">
             <a:avLst/>
@@ -12615,8 +12615,8 @@
         </p:nvSpPr>
         <p:spPr>
           <a:xfrm>
-            <a:off x="777240" y="4928870"/>
-            <a:ext cx="41148" cy="868680"/>
+            <a:off x="777240" y="4892294"/>
+            <a:ext cx="41148" cy="987552"/>
           </a:xfrm>
           <a:prstGeom prst="rect">
             <a:avLst/>
@@ -12659,8 +12659,8 @@
         </p:nvSpPr>
         <p:spPr>
           <a:xfrm>
-            <a:off x="1051560" y="5056885"/>
-            <a:ext cx="10088575" cy="685800"/>
+            <a:off x="1051560" y="5011166"/>
+            <a:ext cx="10088575" cy="804672"/>
           </a:xfrm>
           <a:prstGeom prst="rect">
             <a:avLst/>
